--- a/public/pitch-decks/investor-100/pptx/118-schroder-adveq.pptx
+++ b/public/pitch-decks/investor-100/pptx/118-schroder-adveq.pptx
@@ -1769,6 +1769,10 @@
           </a:solidFill>
           <a:ln/>
         </p:spPr>
+        <p:txBody>
+          <a:bodyPr/>
+          <a:p/>
+        </p:txBody>
       </p:sp>
       <p:sp>
         <p:nvSpPr>
@@ -1908,7 +1912,7 @@
                   <a:srgbClr val="8B8FA3"/>
                 </a:solidFill>
               </a:rPr>
-              <a:t>Decision Crisis Immunization Infrastructure</a:t>
+              <a:t>Decision Evidence Infrastructure for AI Systems</a:t>
             </a:r>
             <a:endParaRPr lang="en-US" sz="1500" dirty="0"/>
           </a:p>
@@ -1936,6 +1940,10 @@
             <a:prstDash val="solid"/>
           </a:ln>
         </p:spPr>
+        <p:txBody>
+          <a:bodyPr/>
+          <a:p/>
+        </p:txBody>
       </p:sp>
       <p:sp>
         <p:nvSpPr>
@@ -2215,7 +2223,7 @@
                   <a:srgbClr val="8B8FA3"/>
                 </a:solidFill>
               </a:rPr>
-              <a:t>Personalized for Schroders Capital — Swiss-grade data sovereignty for AI governance</a:t>
+              <a:t>Prepared for Schroders Capital — Swiss-grade data sovereignty for AI governance</a:t>
             </a:r>
             <a:endParaRPr lang="en-US" sz="1400" dirty="0"/>
           </a:p>
@@ -2242,6 +2250,10 @@
           </a:solidFill>
           <a:ln/>
         </p:spPr>
+        <p:txBody>
+          <a:bodyPr/>
+          <a:p/>
+        </p:txBody>
       </p:sp>
       <p:sp>
         <p:nvSpPr>
@@ -2300,6 +2312,10 @@
           </a:solidFill>
           <a:ln/>
         </p:spPr>
+        <p:txBody>
+          <a:bodyPr/>
+          <a:p/>
+        </p:txBody>
       </p:sp>
       <p:sp>
         <p:nvSpPr>
@@ -2358,6 +2374,10 @@
           </a:solidFill>
           <a:ln/>
         </p:spPr>
+        <p:txBody>
+          <a:bodyPr/>
+          <a:p/>
+        </p:txBody>
       </p:sp>
       <p:sp>
         <p:nvSpPr>
@@ -2416,6 +2436,10 @@
           </a:solidFill>
           <a:ln/>
         </p:spPr>
+        <p:txBody>
+          <a:bodyPr/>
+          <a:p/>
+        </p:txBody>
       </p:sp>
       <p:sp>
         <p:nvSpPr>
@@ -2797,6 +2821,10 @@
           </a:solidFill>
           <a:ln/>
         </p:spPr>
+        <p:txBody>
+          <a:bodyPr/>
+          <a:p/>
+        </p:txBody>
       </p:sp>
       <p:sp>
         <p:nvSpPr>
@@ -2894,6 +2922,10 @@
           </a:solidFill>
           <a:ln/>
         </p:spPr>
+        <p:txBody>
+          <a:bodyPr/>
+          <a:p/>
+        </p:txBody>
       </p:sp>
       <p:sp>
         <p:nvSpPr>
@@ -3234,7 +3266,7 @@
                   <a:srgbClr val="FFFFFF"/>
                 </a:solidFill>
               </a:rPr>
-              <a:t>Enterprise AI Has No Accountability Layer</a:t>
+              <a:t>Enterprise AI Has No Decision Evidence Layer</a:t>
             </a:r>
             <a:endParaRPr lang="en-US" sz="2400" dirty="0"/>
           </a:p>
@@ -3274,7 +3306,7 @@
                   <a:srgbClr val="8B8FA3"/>
                 </a:solidFill>
               </a:rPr>
-              <a:t>AI systems make high-stakes decisions with no audit trail, no evidence, and no dissent tracking</a:t>
+              <a:t>Every enterprise deploying AI will be required to produce decision evidence under regulatory or legal challenge — and no platform exists to generate it</a:t>
             </a:r>
             <a:endParaRPr lang="en-US" sz="1300" dirty="0"/>
           </a:p>
@@ -3328,7 +3360,7 @@
                   <a:srgbClr val="8B8FA3"/>
                 </a:solidFill>
               </a:rPr>
-              <a:t>No existing platform provides cryptographic proof of AI-assisted decisions</a:t>
+              <a:t>No widely adopted platform provides cryptographically verifiable decision evidence at the decision level</a:t>
             </a:r>
             <a:endParaRPr lang="en-US" sz="1300" dirty="0"/>
           </a:p>
@@ -3373,6 +3405,10 @@
           </a:solidFill>
           <a:ln/>
         </p:spPr>
+        <p:txBody>
+          <a:bodyPr/>
+          <a:p/>
+        </p:txBody>
       </p:sp>
       <p:sp>
         <p:nvSpPr>
@@ -3467,6 +3503,10 @@
           </a:solidFill>
           <a:ln/>
         </p:spPr>
+        <p:txBody>
+          <a:bodyPr/>
+          <a:p/>
+        </p:txBody>
       </p:sp>
       <p:sp>
         <p:nvSpPr>
@@ -3534,7 +3574,7 @@
                   <a:srgbClr val="8B8FA3"/>
                 </a:solidFill>
               </a:rPr>
-              <a:t>Platforms w/ crypto AI evidence</a:t>
+              <a:t>Widely adopted decision-evidence platforms</a:t>
             </a:r>
             <a:endParaRPr lang="en-US" sz="900" dirty="0"/>
           </a:p>
@@ -3561,6 +3601,10 @@
           </a:solidFill>
           <a:ln/>
         </p:spPr>
+        <p:txBody>
+          <a:bodyPr/>
+          <a:p/>
+        </p:txBody>
       </p:sp>
       <p:sp>
         <p:nvSpPr>
@@ -3655,6 +3699,10 @@
           </a:solidFill>
           <a:ln/>
         </p:spPr>
+        <p:txBody>
+          <a:bodyPr/>
+          <a:p/>
+        </p:txBody>
       </p:sp>
       <p:sp>
         <p:nvSpPr>
@@ -4091,6 +4139,10 @@
           </a:solidFill>
           <a:ln/>
         </p:spPr>
+        <p:txBody>
+          <a:bodyPr/>
+          <a:p/>
+        </p:txBody>
       </p:sp>
       <p:sp>
         <p:nvSpPr>
@@ -4185,6 +4237,10 @@
           </a:solidFill>
           <a:ln/>
         </p:spPr>
+        <p:txBody>
+          <a:bodyPr/>
+          <a:p/>
+        </p:txBody>
       </p:sp>
       <p:sp>
         <p:nvSpPr>
@@ -4243,6 +4299,10 @@
           </a:solidFill>
           <a:ln/>
         </p:spPr>
+        <p:txBody>
+          <a:bodyPr/>
+          <a:p/>
+        </p:txBody>
       </p:sp>
       <p:sp>
         <p:nvSpPr>
@@ -4274,7 +4334,7 @@
                   <a:srgbClr val="D4AF37"/>
                 </a:solidFill>
               </a:rPr>
-              <a:t>90-Day Guarantee</a:t>
+              <a:t>Why This Must Exist Now</a:t>
             </a:r>
             <a:endParaRPr lang="en-US" sz="1300" dirty="0"/>
           </a:p>
@@ -4313,7 +4373,7 @@
                   <a:srgbClr val="8B8FA3"/>
                 </a:solidFill>
               </a:rPr>
-              <a:t>Deploy Datacendia for 90 days on a single strategic problem. If the Council doesn't identify at least 3 critical risks you missed, we refund the pilot fee.</a:t>
+              <a:t>EU AI Act (2025–2026) → enforceable auditability requirements. DORA → operational traceability for financial services. Litigation risk → retrospective scrutiny of AI decisions. Enterprise AI adoption → exploding unaudited decision surface. This creates a new infrastructure requirement: decision evidence.</a:t>
             </a:r>
             <a:endParaRPr lang="en-US" sz="1000" dirty="0"/>
           </a:p>
@@ -4552,6 +4612,10 @@
           </a:solidFill>
           <a:ln/>
         </p:spPr>
+        <p:txBody>
+          <a:bodyPr/>
+          <a:p/>
+        </p:txBody>
       </p:sp>
       <p:sp>
         <p:nvSpPr>
@@ -4646,6 +4710,10 @@
           </a:solidFill>
           <a:ln/>
         </p:spPr>
+        <p:txBody>
+          <a:bodyPr/>
+          <a:p/>
+        </p:txBody>
       </p:sp>
       <p:sp>
         <p:nvSpPr>
@@ -4740,6 +4808,10 @@
           </a:solidFill>
           <a:ln/>
         </p:spPr>
+        <p:txBody>
+          <a:bodyPr/>
+          <a:p/>
+        </p:txBody>
       </p:sp>
       <p:sp>
         <p:nvSpPr>
@@ -4834,6 +4906,10 @@
           </a:solidFill>
           <a:ln/>
         </p:spPr>
+        <p:txBody>
+          <a:bodyPr/>
+          <a:p/>
+        </p:txBody>
       </p:sp>
       <p:sp>
         <p:nvSpPr>
@@ -4928,6 +5004,10 @@
           </a:solidFill>
           <a:ln/>
         </p:spPr>
+        <p:txBody>
+          <a:bodyPr/>
+          <a:p/>
+        </p:txBody>
       </p:sp>
       <p:sp>
         <p:nvSpPr>
@@ -5022,6 +5102,10 @@
           </a:solidFill>
           <a:ln/>
         </p:spPr>
+        <p:txBody>
+          <a:bodyPr/>
+          <a:p/>
+        </p:txBody>
       </p:sp>
       <p:sp>
         <p:nvSpPr>
@@ -5136,6 +5220,10 @@
           </a:solidFill>
           <a:ln/>
         </p:spPr>
+        <p:txBody>
+          <a:bodyPr/>
+          <a:p/>
+        </p:txBody>
       </p:sp>
       <p:sp>
         <p:nvSpPr>
@@ -6270,6 +6358,10 @@
           </a:solidFill>
           <a:ln/>
         </p:spPr>
+        <p:txBody>
+          <a:bodyPr/>
+          <a:p/>
+        </p:txBody>
       </p:sp>
       <p:sp>
         <p:nvSpPr>
@@ -6579,6 +6671,10 @@
           </a:solidFill>
           <a:ln/>
         </p:spPr>
+        <p:txBody>
+          <a:bodyPr/>
+          <a:p/>
+        </p:txBody>
       </p:sp>
       <p:sp>
         <p:nvSpPr>
@@ -6676,6 +6772,10 @@
           </a:solidFill>
           <a:ln/>
         </p:spPr>
+        <p:txBody>
+          <a:bodyPr/>
+          <a:p/>
+        </p:txBody>
       </p:sp>
       <p:sp>
         <p:nvSpPr>
@@ -6746,7 +6846,7 @@
                   <a:srgbClr val="8B8FA3"/>
                 </a:solidFill>
               </a:rPr>
-              <a:t>2 warm enterprise intros (financial institution, Big 4 channel). NVIDIA Inception member.</a:t>
+              <a:t>Active enterprise design-partner conversations (financial institution, Big 4 channel). NVIDIA Inception member. 3 LOI-stage discussions.</a:t>
             </a:r>
             <a:endParaRPr lang="en-US" sz="1100" dirty="0"/>
           </a:p>
@@ -6773,6 +6873,10 @@
           </a:solidFill>
           <a:ln/>
         </p:spPr>
+        <p:txBody>
+          <a:bodyPr/>
+          <a:p/>
+        </p:txBody>
       </p:sp>
       <p:sp>
         <p:nvSpPr>
@@ -6843,7 +6947,7 @@
                   <a:srgbClr val="8B8FA3"/>
                 </a:solidFill>
               </a:rPr>
-              <a:t>GTM hiring, SOC 2 Type II certification, first enterprise pilots.</a:t>
+              <a:t>First 3 design partners signed, SOC 2 Type II certification, regulatory validation (EU AI Act compliance audit).</a:t>
             </a:r>
             <a:endParaRPr lang="en-US" sz="1100" dirty="0"/>
           </a:p>

--- a/public/pitch-decks/investor-100/pptx/118-schroder-adveq.pptx
+++ b/public/pitch-decks/investor-100/pptx/118-schroder-adveq.pptx
@@ -5389,6 +5389,30 @@
           </a:p>
         </p:txBody>
       </p:sp>
+      <p:pic>
+        <p:nvPicPr>
+          <p:cNvPr id="28" name="Picture 27" descr="nvidia-inception-program-badge-rgb-for-screen.png"/>
+          <p:cNvPicPr>
+            <a:picLocks noChangeAspect="1"/>
+          </p:cNvPicPr>
+          <p:nvPr/>
+        </p:nvPicPr>
+        <p:blipFill>
+          <a:blip r:embed="rId3"/>
+          <a:stretch>
+            <a:fillRect/>
+          </a:stretch>
+        </p:blipFill>
+        <p:spPr>
+          <a:xfrm>
+            <a:off x="4892040" y="4023360"/>
+            <a:ext cx="1645920" cy="822960"/>
+          </a:xfrm>
+          <a:prstGeom prst="rect">
+            <a:avLst/>
+          </a:prstGeom>
+        </p:spPr>
+      </p:pic>
     </p:spTree>
   </p:cSld>
   <p:clrMapOvr>
